--- a/docs/PRESENTASI_UAS.pptx
+++ b/docs/PRESENTASI_UAS.pptx
@@ -3368,7 +3368,7 @@
               </a:defRPr>
             </a:pPr>
             <a:r>
-              <a:t>Universitas Amikom Yogyakarta | 2025</a:t>
+              <a:t>Universitas Amikom Yogyakarta | 2026</a:t>
             </a:r>
           </a:p>
         </p:txBody>
